--- a/submission/_drafts/속도는벡터_5월8일회의_v1.pptx
+++ b/submission/_drafts/속도는벡터_5월8일회의_v1.pptx
@@ -6200,7 +6200,7 @@
                 <a:latin typeface="JetBrains Mono"/>
                 <a:ea typeface="JetBrains Mono"/>
               </a:rPr>
-              <a:t>MULTI-VECTOR (한 행 두 임베딩)</a:t>
+              <a:t>MULTI-VECTOR × 4강 (sel=0.10 paired Δ%)</a:t>
             </a:r>
           </a:p>
         </p:txBody>
@@ -6215,7 +6215,7 @@
         </p:nvGraphicFramePr>
         <p:xfrm>
           <a:off x="944575" y="2286000"/>
-          <a:ext cx="4663440" cy="877824"/>
+          <a:ext cx="5029200" cy="877824"/>
         </p:xfrm>
         <a:graphic>
           <a:graphicData uri="http://schemas.openxmlformats.org/drawingml/2006/table">
@@ -6225,9 +6225,10 @@
               </a:tblPr>
               <a:tblGrid>
                 <a:gridCol w="1828800"/>
-                <a:gridCol w="914400"/>
-                <a:gridCol w="960120"/>
-                <a:gridCol w="960120"/>
+                <a:gridCol w="777240"/>
+                <a:gridCol w="777240"/>
+                <a:gridCol w="777240"/>
+                <a:gridCol w="868680"/>
               </a:tblGrid>
               <a:tr h="292608">
                 <a:tc>
@@ -6244,7 +6245,7 @@
                           <a:latin typeface="JetBrains Mono"/>
                           <a:ea typeface="JetBrains Mono"/>
                         </a:rPr>
-                        <a:t>Cell</a:t>
+                        <a:t>Cell (96+dim)</a:t>
                       </a:r>
                     </a:p>
                   </a:txBody>
@@ -6268,7 +6269,7 @@
                           <a:latin typeface="JetBrains Mono"/>
                           <a:ea typeface="JetBrains Mono"/>
                         </a:rPr>
-                        <a:t>dim</a:t>
+                        <a:t>hdbscan</a:t>
                       </a:r>
                     </a:p>
                   </a:txBody>
@@ -6292,7 +6293,7 @@
                           <a:latin typeface="JetBrains Mono"/>
                           <a:ea typeface="JetBrains Mono"/>
                         </a:rPr>
-                        <a:t>concat</a:t>
+                        <a:t>hilbert</a:t>
                       </a:r>
                     </a:p>
                   </a:txBody>
@@ -6316,7 +6317,31 @@
                           <a:latin typeface="JetBrains Mono"/>
                           <a:ea typeface="JetBrains Mono"/>
                         </a:rPr>
-                        <a:t>product</a:t>
+                        <a:t>hybrid</a:t>
+                      </a:r>
+                    </a:p>
+                  </a:txBody>
+                  <a:tcPr marL="54864" marR="54864" marT="36576" marB="36576">
+                    <a:solidFill>
+                      <a:srgbClr val="FAFBFC"/>
+                    </a:solidFill>
+                  </a:tcPr>
+                </a:tc>
+                <a:tc>
+                  <a:txBody>
+                    <a:bodyPr wrap="square"/>
+                    <a:lstStyle/>
+                    <a:p>
+                      <a:pPr algn="r"/>
+                      <a:r>
+                        <a:rPr sz="850" b="1" i="0">
+                          <a:solidFill>
+                            <a:srgbClr val="6E7891"/>
+                          </a:solidFill>
+                          <a:latin typeface="JetBrains Mono"/>
+                          <a:ea typeface="JetBrains Mono"/>
+                        </a:rPr>
+                        <a:t>mb_partial</a:t>
                       </a:r>
                     </a:p>
                   </a:txBody>
@@ -6366,7 +6391,7 @@
                           <a:latin typeface="JetBrains Mono"/>
                           <a:ea typeface="JetBrains Mono"/>
                         </a:rPr>
-                        <a:t>96+128</a:t>
+                        <a:t>−1.02%</a:t>
                       </a:r>
                     </a:p>
                   </a:txBody>
@@ -6390,7 +6415,7 @@
                           <a:latin typeface="JetBrains Mono"/>
                           <a:ea typeface="JetBrains Mono"/>
                         </a:rPr>
-                        <a:t>−0.35%</a:t>
+                        <a:t>−0.48%</a:t>
                       </a:r>
                     </a:p>
                   </a:txBody>
@@ -6414,7 +6439,31 @@
                           <a:latin typeface="JetBrains Mono"/>
                           <a:ea typeface="JetBrains Mono"/>
                         </a:rPr>
-                        <a:t>−1.15%</a:t>
+                        <a:t>+0.31%</a:t>
+                      </a:r>
+                    </a:p>
+                  </a:txBody>
+                  <a:tcPr marL="54864" marR="54864" marT="36576" marB="36576">
+                    <a:solidFill>
+                      <a:srgbClr val="FFFFFF"/>
+                    </a:solidFill>
+                  </a:tcPr>
+                </a:tc>
+                <a:tc>
+                  <a:txBody>
+                    <a:bodyPr wrap="square"/>
+                    <a:lstStyle/>
+                    <a:p>
+                      <a:pPr algn="r"/>
+                      <a:r>
+                        <a:rPr sz="900" b="0" i="0">
+                          <a:solidFill>
+                            <a:srgbClr val="1A2238"/>
+                          </a:solidFill>
+                          <a:latin typeface="JetBrains Mono"/>
+                          <a:ea typeface="JetBrains Mono"/>
+                        </a:rPr>
+                        <a:t>−1.30%</a:t>
                       </a:r>
                     </a:p>
                   </a:txBody>
@@ -6464,7 +6513,7 @@
                           <a:latin typeface="JetBrains Mono"/>
                           <a:ea typeface="JetBrains Mono"/>
                         </a:rPr>
-                        <a:t>96+768</a:t>
+                        <a:t>+1.15%</a:t>
                       </a:r>
                     </a:p>
                   </a:txBody>
@@ -6488,7 +6537,7 @@
                           <a:latin typeface="JetBrains Mono"/>
                           <a:ea typeface="JetBrains Mono"/>
                         </a:rPr>
-                        <a:t>−0.30%</a:t>
+                        <a:t>+0.06%</a:t>
                       </a:r>
                     </a:p>
                   </a:txBody>
@@ -6512,7 +6561,31 @@
                           <a:latin typeface="JetBrains Mono"/>
                           <a:ea typeface="JetBrains Mono"/>
                         </a:rPr>
-                        <a:t>+0.53%</a:t>
+                        <a:t>+0.08%</a:t>
+                      </a:r>
+                    </a:p>
+                  </a:txBody>
+                  <a:tcPr marL="54864" marR="54864" marT="36576" marB="36576">
+                    <a:solidFill>
+                      <a:srgbClr val="FFFFFF"/>
+                    </a:solidFill>
+                  </a:tcPr>
+                </a:tc>
+                <a:tc>
+                  <a:txBody>
+                    <a:bodyPr wrap="square"/>
+                    <a:lstStyle/>
+                    <a:p>
+                      <a:pPr algn="r"/>
+                      <a:r>
+                        <a:rPr sz="900" b="0" i="0">
+                          <a:solidFill>
+                            <a:srgbClr val="1A2238"/>
+                          </a:solidFill>
+                          <a:latin typeface="JetBrains Mono"/>
+                          <a:ea typeface="JetBrains Mono"/>
+                        </a:rPr>
+                        <a:t>+0.99%</a:t>
                       </a:r>
                     </a:p>
                   </a:txBody>
@@ -6557,7 +6630,7 @@
                 <a:latin typeface="Pretendard"/>
                 <a:ea typeface="Pretendard"/>
               </a:rPr>
-              <a:t>measure_multi_vector.py · concat 또는 separate column 두 시나리오</a:t>
+              <a:t>STAGE 1+2 완료 (5/8) · n=2500/cell · sign 3/8 neg · |Δ| &lt; 1.5% marginal</a:t>
             </a:r>
           </a:p>
         </p:txBody>
@@ -6640,7 +6713,7 @@
                 <a:latin typeface="JetBrains Mono"/>
                 <a:ea typeface="JetBrains Mono"/>
               </a:rPr>
-              <a:t>MULTI-TABLE NATURAL JOIN</a:t>
+              <a:t>MULTI-TABLE NATURAL JOIN × 4강 — STAGE 3 측정 진행 중</a:t>
             </a:r>
           </a:p>
         </p:txBody>
@@ -6698,7 +6771,7 @@
                     <a:bodyPr wrap="square"/>
                     <a:lstStyle/>
                     <a:p>
-                      <a:pPr algn="l"/>
+                      <a:pPr algn="r"/>
                       <a:r>
                         <a:rPr sz="850" b="1" i="0">
                           <a:solidFill>
@@ -6731,7 +6804,7 @@
                           <a:latin typeface="JetBrains Mono"/>
                           <a:ea typeface="JetBrains Mono"/>
                         </a:rPr>
-                        <a:t>best mode Δ%</a:t>
+                        <a:t>STAGE 3 4강 Δ%</a:t>
                       </a:r>
                     </a:p>
                   </a:txBody>
@@ -6772,30 +6845,6 @@
                     <a:bodyPr wrap="square"/>
                     <a:lstStyle/>
                     <a:p>
-                      <a:pPr algn="l"/>
-                      <a:r>
-                        <a:rPr sz="900" b="0" i="0">
-                          <a:solidFill>
-                            <a:srgbClr val="1A2238"/>
-                          </a:solidFill>
-                          <a:latin typeface="Pretendard"/>
-                          <a:ea typeface="Pretendard"/>
-                        </a:rPr>
-                        <a:t>TPC-H</a:t>
-                      </a:r>
-                    </a:p>
-                  </a:txBody>
-                  <a:tcPr marL="54864" marR="54864" marT="36576" marB="36576">
-                    <a:solidFill>
-                      <a:srgbClr val="FFFFFF"/>
-                    </a:solidFill>
-                  </a:tcPr>
-                </a:tc>
-                <a:tc>
-                  <a:txBody>
-                    <a:bodyPr wrap="square"/>
-                    <a:lstStyle/>
-                    <a:p>
                       <a:pPr algn="r"/>
                       <a:r>
                         <a:rPr sz="900" b="0" i="0">
@@ -6805,7 +6854,31 @@
                           <a:latin typeface="JetBrains Mono"/>
                           <a:ea typeface="JetBrains Mono"/>
                         </a:rPr>
-                        <a:t>+1.51%</a:t>
+                        <a:t>TPC-H</a:t>
+                      </a:r>
+                    </a:p>
+                  </a:txBody>
+                  <a:tcPr marL="54864" marR="54864" marT="36576" marB="36576">
+                    <a:solidFill>
+                      <a:srgbClr val="FFFFFF"/>
+                    </a:solidFill>
+                  </a:tcPr>
+                </a:tc>
+                <a:tc>
+                  <a:txBody>
+                    <a:bodyPr wrap="square"/>
+                    <a:lstStyle/>
+                    <a:p>
+                      <a:pPr algn="r"/>
+                      <a:r>
+                        <a:rPr sz="900" b="0" i="0">
+                          <a:solidFill>
+                            <a:srgbClr val="1A2238"/>
+                          </a:solidFill>
+                          <a:latin typeface="JetBrains Mono"/>
+                          <a:ea typeface="JetBrains Mono"/>
+                        </a:rPr>
+                        <a:t>측정 중 (회의 후)</a:t>
                       </a:r>
                     </a:p>
                   </a:txBody>
@@ -7011,7 +7084,7 @@
                 <a:latin typeface="JetBrains Mono"/>
                 <a:ea typeface="JetBrains Mono"/>
               </a:rPr>
-              <a:t>EXQUTOR 매칭 LOGIC</a:t>
+              <a:t>MAGNITUDE SHRINKAGE — SINGLE → MULTI</a:t>
             </a:r>
           </a:p>
           <a:p>
@@ -7028,7 +7101,7 @@
                 <a:latin typeface="Pretendard"/>
                 <a:ea typeface="Pretendard"/>
               </a:rPr>
-              <a:t>Exqutor 본 논문의 ECQO 핵심 contribution 영역 = </a:t>
+              <a:t>단일 sweet spot 4강 평균 |Δ%| </a:t>
             </a:r>
             <a:r>
               <a:rPr sz="1100" b="1" i="0">
@@ -7038,7 +7111,7 @@
                 <a:latin typeface="Pretendard"/>
                 <a:ea typeface="Pretendard"/>
               </a:rPr>
-              <a:t>multi-table query</a:t>
+              <a:t>17.13%</a:t>
             </a:r>
             <a:r>
               <a:rPr sz="1100" b="0" i="0">
@@ -7048,7 +7121,7 @@
                 <a:latin typeface="Pretendard"/>
                 <a:ea typeface="Pretendard"/>
               </a:rPr>
-              <a:t>. 본 연구는 </a:t>
+              <a:t> (SIFT/WIKI/YFCC sf1) → multi-vector 4강 평균 |Δ%| </a:t>
             </a:r>
             <a:r>
               <a:rPr sz="1100" b="1" i="0">
@@ -7058,7 +7131,7 @@
                 <a:latin typeface="Pretendard"/>
                 <a:ea typeface="Pretendard"/>
               </a:rPr>
-              <a:t>단일 정확성</a:t>
+              <a:t>0.67%</a:t>
             </a:r>
             <a:r>
               <a:rPr sz="1100" b="0" i="0">
@@ -7068,7 +7141,7 @@
                 <a:latin typeface="Pretendard"/>
                 <a:ea typeface="Pretendard"/>
               </a:rPr>
-              <a:t> 으로 multi 정확성의 </a:t>
+              <a:t> (sel=0.10). magnitude </a:t>
             </a:r>
             <a:r>
               <a:rPr sz="1100" b="1" i="0">
@@ -7078,7 +7151,7 @@
                 <a:latin typeface="Pretendard"/>
                 <a:ea typeface="Pretendard"/>
               </a:rPr>
-              <a:t>필요조건만</a:t>
+              <a:t>25.4× 약화</a:t>
             </a:r>
             <a:r>
               <a:rPr sz="1100" b="0" i="0">
@@ -7088,7 +7161,27 @@
                 <a:latin typeface="Pretendard"/>
                 <a:ea typeface="Pretendard"/>
               </a:rPr>
-              <a:t> 입증 — 충분조건 일반화는 future work.</a:t>
+              <a:t>. 단일 정확성 = multi 정확성의 </a:t>
+            </a:r>
+            <a:r>
+              <a:rPr sz="1100" b="1" i="0">
+                <a:solidFill>
+                  <a:srgbClr val="1B3DAD"/>
+                </a:solidFill>
+                <a:latin typeface="Pretendard"/>
+                <a:ea typeface="Pretendard"/>
+              </a:rPr>
+              <a:t>필요조건만</a:t>
+            </a:r>
+            <a:r>
+              <a:rPr sz="1100" b="0" i="0">
+                <a:solidFill>
+                  <a:srgbClr val="1A2238"/>
+                </a:solidFill>
+                <a:latin typeface="Pretendard"/>
+                <a:ea typeface="Pretendard"/>
+              </a:rPr>
+              <a:t> (충분조건 X).</a:t>
             </a:r>
           </a:p>
           <a:p>
@@ -7115,7 +7208,7 @@
                 <a:latin typeface="Pretendard"/>
                 <a:ea typeface="Pretendard"/>
               </a:rPr>
-              <a:t>Multi-vector: 한 row 두 임베딩 → concat·separate 두 ablation</a:t>
+              <a:t>sel=0.01: 8/8 hurt (sample budget narrow)</a:t>
             </a:r>
           </a:p>
           <a:p>
@@ -7142,7 +7235,7 @@
                 <a:latin typeface="Pretendard"/>
                 <a:ea typeface="Pretendard"/>
               </a:rPr>
-              <a:t>Multi-table: TPC-H natural join 직접 매칭</a:t>
+              <a:t>sel=0.10: 3/8 neg · 5/8 pos (boundary, |Δ| &lt; 1.5%)</a:t>
             </a:r>
           </a:p>
           <a:p>
@@ -7169,7 +7262,34 @@
                 <a:latin typeface="Pretendard"/>
                 <a:ea typeface="Pretendard"/>
               </a:rPr>
-              <a:t>4강 method 의 multi-relation 일관성 입증</a:t>
+              <a:t>sel=0.50: 7/8 neg (수렴, magnitude marginal)</a:t>
+            </a:r>
+          </a:p>
+          <a:p>
+            <a:pPr>
+              <a:spcBef>
+                <a:spcPts val="300"/>
+              </a:spcBef>
+            </a:pPr>
+            <a:r>
+              <a:rPr sz="1000" b="1" i="0">
+                <a:solidFill>
+                  <a:srgbClr val="1B3DAD"/>
+                </a:solidFill>
+                <a:latin typeface="Pretendard"/>
+                <a:ea typeface="Pretendard"/>
+              </a:rPr>
+              <a:t>▪ </a:t>
+            </a:r>
+            <a:r>
+              <a:rPr sz="1000" b="0" i="0">
+                <a:solidFill>
+                  <a:srgbClr val="4B5470"/>
+                </a:solidFill>
+                <a:latin typeface="Pretendard"/>
+                <a:ea typeface="Pretendard"/>
+              </a:rPr>
+              <a:t>method ranking 보존 X — multi 환경 노이즈 수준</a:t>
             </a:r>
           </a:p>
         </p:txBody>
@@ -7271,7 +7391,7 @@
                 <a:latin typeface="JetBrains Mono"/>
                 <a:ea typeface="JetBrains Mono"/>
               </a:rPr>
-              <a:t>MULTI-RELATION TAKEAWAY</a:t>
+              <a:t>MULTI-RELATION FUTURE WORK</a:t>
             </a:r>
           </a:p>
           <a:p>
@@ -7288,7 +7408,7 @@
                 <a:latin typeface="Pretendard"/>
                 <a:ea typeface="Pretendard"/>
               </a:rPr>
-              <a:t>Exqutor 본래 contribution 영역 = </a:t>
+              <a:t>단일 sweet spot의 강력 improve가 multi-vector에서 marginal로 약화 → multi-relation 일반화는 </a:t>
             </a:r>
             <a:r>
               <a:rPr sz="1000" b="1" i="0">
@@ -7298,7 +7418,7 @@
                 <a:latin typeface="Pretendard"/>
                 <a:ea typeface="Pretendard"/>
               </a:rPr>
-              <a:t>multi-relation query</a:t>
+              <a:t>joint-aware clustering</a:t>
             </a:r>
             <a:r>
               <a:rPr sz="1000" b="0" i="0">
@@ -7308,7 +7428,27 @@
                 <a:latin typeface="Pretendard"/>
                 <a:ea typeface="Pretendard"/>
               </a:rPr>
-              <a:t>. 본 연구의 4강 method (Hilbert · MiniBatch_partial · Hybrid · HDBSCAN) 가 multi-vector + natural join 영역에서 부호·크기 일관성을 유지하는지 정량 검증.</a:t>
+              <a:t> 또는 </a:t>
+            </a:r>
+            <a:r>
+              <a:rPr sz="1000" b="1" i="0">
+                <a:solidFill>
+                  <a:srgbClr val="0B0F1C"/>
+                </a:solidFill>
+                <a:latin typeface="Pretendard"/>
+                <a:ea typeface="Pretendard"/>
+              </a:rPr>
+              <a:t>multi-vector decomposition</a:t>
+            </a:r>
+            <a:r>
+              <a:rPr sz="1000" b="0" i="0">
+                <a:solidFill>
+                  <a:srgbClr val="1A2238"/>
+                </a:solidFill>
+                <a:latin typeface="Pretendard"/>
+                <a:ea typeface="Pretendard"/>
+              </a:rPr>
+              <a:t> 별도 설계 필요. STAGE 3 multi-table join × 4강 측정은 회의 후 보강.</a:t>
             </a:r>
           </a:p>
         </p:txBody>
